--- a/EDA_AVL.pptx
+++ b/EDA_AVL.pptx
@@ -269,7 +269,7 @@
           <a:p>
             <a:fld id="{A4B2B2D3-EE19-42DC-AE9B-492B0A0C6181}" type="datetimeFigureOut">
               <a:rPr lang="pt-PT" smtClean="0"/>
-              <a:t>21/10/2022</a:t>
+              <a:t>30/04/2025</a:t>
             </a:fld>
             <a:endParaRPr lang="pt-PT"/>
           </a:p>
@@ -439,7 +439,7 @@
           <a:p>
             <a:fld id="{A4B2B2D3-EE19-42DC-AE9B-492B0A0C6181}" type="datetimeFigureOut">
               <a:rPr lang="pt-PT" smtClean="0"/>
-              <a:t>21/10/2022</a:t>
+              <a:t>30/04/2025</a:t>
             </a:fld>
             <a:endParaRPr lang="pt-PT"/>
           </a:p>
@@ -619,7 +619,7 @@
           <a:p>
             <a:fld id="{A4B2B2D3-EE19-42DC-AE9B-492B0A0C6181}" type="datetimeFigureOut">
               <a:rPr lang="pt-PT" smtClean="0"/>
-              <a:t>21/10/2022</a:t>
+              <a:t>30/04/2025</a:t>
             </a:fld>
             <a:endParaRPr lang="pt-PT"/>
           </a:p>
@@ -789,7 +789,7 @@
           <a:p>
             <a:fld id="{A4B2B2D3-EE19-42DC-AE9B-492B0A0C6181}" type="datetimeFigureOut">
               <a:rPr lang="pt-PT" smtClean="0"/>
-              <a:t>21/10/2022</a:t>
+              <a:t>30/04/2025</a:t>
             </a:fld>
             <a:endParaRPr lang="pt-PT"/>
           </a:p>
@@ -1035,7 +1035,7 @@
           <a:p>
             <a:fld id="{A4B2B2D3-EE19-42DC-AE9B-492B0A0C6181}" type="datetimeFigureOut">
               <a:rPr lang="pt-PT" smtClean="0"/>
-              <a:t>21/10/2022</a:t>
+              <a:t>30/04/2025</a:t>
             </a:fld>
             <a:endParaRPr lang="pt-PT"/>
           </a:p>
@@ -1267,7 +1267,7 @@
           <a:p>
             <a:fld id="{A4B2B2D3-EE19-42DC-AE9B-492B0A0C6181}" type="datetimeFigureOut">
               <a:rPr lang="pt-PT" smtClean="0"/>
-              <a:t>21/10/2022</a:t>
+              <a:t>30/04/2025</a:t>
             </a:fld>
             <a:endParaRPr lang="pt-PT"/>
           </a:p>
@@ -1634,7 +1634,7 @@
           <a:p>
             <a:fld id="{A4B2B2D3-EE19-42DC-AE9B-492B0A0C6181}" type="datetimeFigureOut">
               <a:rPr lang="pt-PT" smtClean="0"/>
-              <a:t>21/10/2022</a:t>
+              <a:t>30/04/2025</a:t>
             </a:fld>
             <a:endParaRPr lang="pt-PT"/>
           </a:p>
@@ -1752,7 +1752,7 @@
           <a:p>
             <a:fld id="{A4B2B2D3-EE19-42DC-AE9B-492B0A0C6181}" type="datetimeFigureOut">
               <a:rPr lang="pt-PT" smtClean="0"/>
-              <a:t>21/10/2022</a:t>
+              <a:t>30/04/2025</a:t>
             </a:fld>
             <a:endParaRPr lang="pt-PT"/>
           </a:p>
@@ -1847,7 +1847,7 @@
           <a:p>
             <a:fld id="{A4B2B2D3-EE19-42DC-AE9B-492B0A0C6181}" type="datetimeFigureOut">
               <a:rPr lang="pt-PT" smtClean="0"/>
-              <a:t>21/10/2022</a:t>
+              <a:t>30/04/2025</a:t>
             </a:fld>
             <a:endParaRPr lang="pt-PT"/>
           </a:p>
@@ -2124,7 +2124,7 @@
           <a:p>
             <a:fld id="{A4B2B2D3-EE19-42DC-AE9B-492B0A0C6181}" type="datetimeFigureOut">
               <a:rPr lang="pt-PT" smtClean="0"/>
-              <a:t>21/10/2022</a:t>
+              <a:t>30/04/2025</a:t>
             </a:fld>
             <a:endParaRPr lang="pt-PT"/>
           </a:p>
@@ -2377,7 +2377,7 @@
           <a:p>
             <a:fld id="{A4B2B2D3-EE19-42DC-AE9B-492B0A0C6181}" type="datetimeFigureOut">
               <a:rPr lang="pt-PT" smtClean="0"/>
-              <a:t>21/10/2022</a:t>
+              <a:t>30/04/2025</a:t>
             </a:fld>
             <a:endParaRPr lang="pt-PT"/>
           </a:p>
@@ -2590,7 +2590,7 @@
           <a:p>
             <a:fld id="{A4B2B2D3-EE19-42DC-AE9B-492B0A0C6181}" type="datetimeFigureOut">
               <a:rPr lang="pt-PT" smtClean="0"/>
-              <a:t>21/10/2022</a:t>
+              <a:t>30/04/2025</a:t>
             </a:fld>
             <a:endParaRPr lang="pt-PT"/>
           </a:p>
@@ -3242,14 +3242,7 @@
                 <a:latin typeface="Times New Roman" pitchFamily="18" charset="0"/>
                 <a:cs typeface="Times New Roman" pitchFamily="18" charset="0"/>
               </a:rPr>
-              <a:t>Estrutura de Dados e </a:t>
-            </a:r>
-            <a:r>
-              <a:rPr lang="pt-PT" sz="2800" dirty="0" smtClean="0">
-                <a:latin typeface="Times New Roman" pitchFamily="18" charset="0"/>
-                <a:cs typeface="Times New Roman" pitchFamily="18" charset="0"/>
-              </a:rPr>
-              <a:t>Algoritmos</a:t>
+              <a:t>Estrutura de Dados e Algoritmos</a:t>
             </a:r>
           </a:p>
           <a:p>
@@ -3265,10 +3258,6 @@
               </a:rPr>
               <a:t>Arvore Balanceada</a:t>
             </a:r>
-            <a:endParaRPr lang="pt-PT" sz="2800" b="1" dirty="0" smtClean="0">
-              <a:latin typeface="Times New Roman" pitchFamily="18" charset="0"/>
-              <a:cs typeface="Times New Roman" pitchFamily="18" charset="0"/>
-            </a:endParaRPr>
           </a:p>
           <a:p>
             <a:endParaRPr lang="pt-PT" dirty="0"/>
@@ -3321,7 +3310,7 @@
         <p:spPr>
           <a:xfrm>
             <a:off x="390144" y="3722311"/>
-            <a:ext cx="4328160" cy="1323439"/>
+            <a:ext cx="4328160" cy="707886"/>
           </a:xfrm>
           <a:prstGeom prst="rect">
             <a:avLst/>
@@ -3336,8 +3325,9 @@
           <a:p>
             <a:r>
               <a:rPr lang="pt-PT" sz="2000" dirty="0" smtClean="0"/>
-              <a:t>Estudantes : </a:t>
-            </a:r>
+              <a:t>Estudantes: </a:t>
+            </a:r>
+            <a:endParaRPr lang="pt-PT" sz="2000" dirty="0" smtClean="0"/>
           </a:p>
           <a:p>
             <a:pPr marL="285750" indent="-285750">
@@ -3346,29 +3336,13 @@
             </a:pPr>
             <a:r>
               <a:rPr lang="pt-PT" sz="2000" dirty="0" smtClean="0"/>
-              <a:t>Munaira Junior ,Luis</a:t>
-            </a:r>
-          </a:p>
-          <a:p>
-            <a:pPr marL="285750" indent="-285750">
-              <a:buFont typeface="Arial" panose="020B0604020202020204" pitchFamily="34" charset="0"/>
-              <a:buChar char="•"/>
-            </a:pPr>
+              <a:t>Munaira Junior ,</a:t>
+            </a:r>
             <a:r>
               <a:rPr lang="pt-PT" sz="2000" dirty="0" smtClean="0"/>
-              <a:t>Nhampalela, Ginencio</a:t>
-            </a:r>
-          </a:p>
-          <a:p>
-            <a:pPr marL="285750" indent="-285750">
-              <a:buFont typeface="Arial" panose="020B0604020202020204" pitchFamily="34" charset="0"/>
-              <a:buChar char="•"/>
-            </a:pPr>
-            <a:r>
-              <a:rPr lang="pt-PT" sz="2000" dirty="0" smtClean="0"/>
-              <a:t>Sebastian , Rui</a:t>
-            </a:r>
-            <a:endParaRPr lang="pt-PT" sz="2000" dirty="0"/>
+              <a:t>Luis</a:t>
+            </a:r>
+            <a:endParaRPr lang="pt-PT" sz="2000" dirty="0" smtClean="0"/>
           </a:p>
         </p:txBody>
       </p:sp>
@@ -11046,11 +11020,7 @@
           <a:p>
             <a:r>
               <a:rPr lang="pt-PT" sz="2800" b="1" dirty="0" smtClean="0"/>
-              <a:t>    </a:t>
-            </a:r>
-            <a:r>
-              <a:rPr lang="pt-PT" sz="2800" b="1" dirty="0" smtClean="0"/>
-              <a:t>Objectivos</a:t>
+              <a:t>    Objectivos</a:t>
             </a:r>
             <a:endParaRPr lang="pt-PT" sz="2800" b="1" dirty="0"/>
           </a:p>
